--- a/分类模型.pptx
+++ b/分类模型.pptx
@@ -3623,15 +3623,22 @@
               </a:spcAft>
             </a:pPr>
             <a:r>
-              <a:rPr sz="2000" b="1">
+              <a:rPr lang="zh-CN" altLang="en-US" sz="2000" b="1" dirty="0">
                 <a:solidFill>
                   <a:srgbClr val="0A0A0A"/>
                 </a:solidFill>
                 <a:latin typeface="微软雅黑"/>
                 <a:ea typeface="微软雅黑"/>
               </a:rPr>
-              <a:t>把原始流水翻译成财务画像：输入与输出</a:t>
-            </a:r>
+              <a:t>分类模型 数字资产沉淀汇总 以用户为示例</a:t>
+            </a:r>
+            <a:endParaRPr sz="2000" b="1" dirty="0">
+              <a:solidFill>
+                <a:srgbClr val="0A0A0A"/>
+              </a:solidFill>
+              <a:latin typeface="微软雅黑"/>
+              <a:ea typeface="微软雅黑"/>
+            </a:endParaRPr>
           </a:p>
         </p:txBody>
       </p:sp>
@@ -3664,14 +3671,24 @@
               </a:spcAft>
             </a:pPr>
             <a:r>
-              <a:rPr sz="1800" b="0">
+              <a:rPr sz="1800" b="0" dirty="0" err="1">
                 <a:solidFill>
                   <a:srgbClr val="606060"/>
                 </a:solidFill>
                 <a:latin typeface="微软雅黑"/>
                 <a:ea typeface="微软雅黑"/>
               </a:rPr>
-              <a:t>银行流水是信审最重要的原料，但原料没有标签；模型把每笔交易翻译成收入与负债，支撑信审决策。</a:t>
+              <a:t>银行流水是信审最重要的原料，但原料没有标签；模型把每笔交易翻译成收入与负债，支撑信审决策</a:t>
+            </a:r>
+            <a:r>
+              <a:rPr sz="1800" b="0" dirty="0">
+                <a:solidFill>
+                  <a:srgbClr val="606060"/>
+                </a:solidFill>
+                <a:latin typeface="微软雅黑"/>
+                <a:ea typeface="微软雅黑"/>
+              </a:rPr>
+              <a:t>。</a:t>
             </a:r>
           </a:p>
         </p:txBody>
@@ -3729,8 +3746,8 @@
         </p:nvSpPr>
         <p:spPr>
           <a:xfrm>
-            <a:off x="5074920" y="1207008"/>
-            <a:ext cx="9144" cy="4846320"/>
+            <a:off x="5074919" y="1207007"/>
+            <a:ext cx="45719" cy="5351447"/>
           </a:xfrm>
           <a:prstGeom prst="rect">
             <a:avLst/>
@@ -3768,34 +3785,35 @@
       </p:sp>
       <p:sp>
         <p:nvSpPr>
-          <p:cNvPr id="6" name="Rectangle 5"/>
+          <p:cNvPr id="24" name="矩形 23">
+            <a:extLst>
+              <a:ext uri="{FF2B5EF4-FFF2-40B4-BE49-F238E27FC236}">
+                <a16:creationId xmlns:a16="http://schemas.microsoft.com/office/drawing/2014/main" id="{77F3BE00-43B9-4485-AAC7-1BD08700698B}"/>
+              </a:ext>
+            </a:extLst>
+          </p:cNvPr>
           <p:cNvSpPr/>
           <p:nvPr/>
         </p:nvSpPr>
         <p:spPr>
           <a:xfrm>
-            <a:off x="512064" y="1234440"/>
-            <a:ext cx="54864" cy="164592"/>
+            <a:off x="512064" y="1406284"/>
+            <a:ext cx="4078855" cy="4885926"/>
           </a:xfrm>
           <a:prstGeom prst="rect">
             <a:avLst/>
           </a:prstGeom>
-          <a:solidFill>
-            <a:srgbClr val="D6A000"/>
-          </a:solidFill>
-          <a:ln>
-            <a:noFill/>
-          </a:ln>
-          <a:effectLst/>
         </p:spPr>
         <p:style>
-          <a:lnRef idx="1">
-            <a:schemeClr val="accent1"/>
+          <a:lnRef idx="2">
+            <a:schemeClr val="accent1">
+              <a:shade val="50000"/>
+            </a:schemeClr>
           </a:lnRef>
-          <a:fillRef idx="3">
+          <a:fillRef idx="1">
             <a:schemeClr val="accent1"/>
           </a:fillRef>
-          <a:effectRef idx="2">
+          <a:effectRef idx="0">
             <a:schemeClr val="accent1"/>
           </a:effectRef>
           <a:fontRef idx="minor">
@@ -3807,121 +3825,41 @@
           <a:lstStyle/>
           <a:p>
             <a:pPr algn="ctr"/>
-            <a:endParaRPr/>
-          </a:p>
-        </p:txBody>
-      </p:sp>
-      <p:sp>
-        <p:nvSpPr>
-          <p:cNvPr id="7" name="TextBox 6"/>
-          <p:cNvSpPr txBox="1"/>
+            <a:endParaRPr lang="zh-CN" altLang="en-US"/>
+          </a:p>
+        </p:txBody>
+      </p:sp>
+      <p:sp>
+        <p:nvSpPr>
+          <p:cNvPr id="25" name="矩形 24">
+            <a:extLst>
+              <a:ext uri="{FF2B5EF4-FFF2-40B4-BE49-F238E27FC236}">
+                <a16:creationId xmlns:a16="http://schemas.microsoft.com/office/drawing/2014/main" id="{1C163591-4CD7-4276-A99B-7C830C9448C3}"/>
+              </a:ext>
+            </a:extLst>
+          </p:cNvPr>
+          <p:cNvSpPr/>
           <p:nvPr/>
         </p:nvSpPr>
         <p:spPr>
           <a:xfrm>
-            <a:off x="640080" y="1207008"/>
-            <a:ext cx="4297680" cy="800099"/>
+            <a:off x="5316132" y="1406284"/>
+            <a:ext cx="6476475" cy="4885926"/>
           </a:xfrm>
           <a:prstGeom prst="rect">
             <a:avLst/>
           </a:prstGeom>
-          <a:noFill/>
-        </p:spPr>
-        <p:txBody>
-          <a:bodyPr wrap="square" lIns="0" tIns="0" rIns="0" bIns="0" anchor="t"/>
-          <a:lstStyle/>
-          <a:p>
-            <a:pPr algn="l">
-              <a:lnSpc>
-                <a:spcPct val="100000"/>
-              </a:lnSpc>
-              <a:spcAft>
-                <a:spcPts val="200"/>
-              </a:spcAft>
-            </a:pPr>
-            <a:r>
-              <a:rPr sz="1000" b="1">
-                <a:solidFill>
-                  <a:srgbClr val="0A0A0A"/>
-                </a:solidFill>
-                <a:latin typeface="微软雅黑"/>
-                <a:ea typeface="微软雅黑"/>
-              </a:rPr>
-              <a:t>为什么重要</a:t>
-            </a:r>
-          </a:p>
-          <a:p>
-            <a:pPr algn="l">
-              <a:lnSpc>
-                <a:spcPct val="105000"/>
-              </a:lnSpc>
-              <a:spcAft>
-                <a:spcPts val="200"/>
-              </a:spcAft>
-            </a:pPr>
-            <a:r>
-              <a:rPr sz="900" b="0">
-                <a:solidFill>
-                  <a:srgbClr val="3D3C3A"/>
-                </a:solidFill>
-                <a:latin typeface="微软雅黑"/>
-                <a:ea typeface="微软雅黑"/>
-              </a:rPr>
-              <a:t>澳洲 Responsible Lending 监管下，信审必须核实客户财务状况，核心公式 Serviceability = 收入 − 必要支出 − 负债还款；新客价值模型最重要的特征全部来自流水，老客风险模型里流水子模型占 </a:t>
-            </a:r>
-            <a:r>
-              <a:rPr sz="900" b="1">
-                <a:solidFill>
-                  <a:srgbClr val="1F4E79"/>
-                </a:solidFill>
-                <a:latin typeface="微软雅黑"/>
-                <a:ea typeface="微软雅黑"/>
-              </a:rPr>
-              <a:t>68.25%</a:t>
-            </a:r>
-            <a:r>
-              <a:rPr sz="900" b="0">
-                <a:solidFill>
-                  <a:srgbClr val="3D3C3A"/>
-                </a:solidFill>
-                <a:latin typeface="微软雅黑"/>
-                <a:ea typeface="微软雅黑"/>
-              </a:rPr>
-              <a:t> 权重——流水翻译的质量，决定上层模型的天花板。</a:t>
-            </a:r>
-          </a:p>
-        </p:txBody>
-      </p:sp>
-      <p:sp>
-        <p:nvSpPr>
-          <p:cNvPr id="8" name="Rectangle 7"/>
-          <p:cNvSpPr/>
-          <p:nvPr/>
-        </p:nvSpPr>
-        <p:spPr>
-          <a:xfrm>
-            <a:off x="512064" y="2130551"/>
-            <a:ext cx="54864" cy="164592"/>
-          </a:xfrm>
-          <a:prstGeom prst="rect">
-            <a:avLst/>
-          </a:prstGeom>
-          <a:solidFill>
-            <a:srgbClr val="D6A000"/>
-          </a:solidFill>
-          <a:ln>
-            <a:noFill/>
-          </a:ln>
-          <a:effectLst/>
         </p:spPr>
         <p:style>
-          <a:lnRef idx="1">
-            <a:schemeClr val="accent1"/>
+          <a:lnRef idx="2">
+            <a:schemeClr val="accent1">
+              <a:shade val="50000"/>
+            </a:schemeClr>
           </a:lnRef>
-          <a:fillRef idx="3">
+          <a:fillRef idx="1">
             <a:schemeClr val="accent1"/>
           </a:fillRef>
-          <a:effectRef idx="2">
+          <a:effectRef idx="0">
             <a:schemeClr val="accent1"/>
           </a:effectRef>
           <a:fontRef idx="minor">
@@ -3933,890 +3871,7 @@
           <a:lstStyle/>
           <a:p>
             <a:pPr algn="ctr"/>
-            <a:endParaRPr/>
-          </a:p>
-        </p:txBody>
-      </p:sp>
-      <p:sp>
-        <p:nvSpPr>
-          <p:cNvPr id="9" name="TextBox 8"/>
-          <p:cNvSpPr txBox="1"/>
-          <p:nvPr/>
-        </p:nvSpPr>
-        <p:spPr>
-          <a:xfrm>
-            <a:off x="640080" y="2103120"/>
-            <a:ext cx="4297680" cy="668655"/>
-          </a:xfrm>
-          <a:prstGeom prst="rect">
-            <a:avLst/>
-          </a:prstGeom>
-          <a:noFill/>
-        </p:spPr>
-        <p:txBody>
-          <a:bodyPr wrap="square" lIns="0" tIns="0" rIns="0" bIns="0" anchor="t"/>
-          <a:lstStyle/>
-          <a:p>
-            <a:pPr algn="l">
-              <a:lnSpc>
-                <a:spcPct val="100000"/>
-              </a:lnSpc>
-              <a:spcAft>
-                <a:spcPts val="200"/>
-              </a:spcAft>
-            </a:pPr>
-            <a:r>
-              <a:rPr sz="1000" b="1">
-                <a:solidFill>
-                  <a:srgbClr val="0A0A0A"/>
-                </a:solidFill>
-                <a:latin typeface="微软雅黑"/>
-                <a:ea typeface="微软雅黑"/>
-              </a:rPr>
-              <a:t>输入是什么</a:t>
-            </a:r>
-          </a:p>
-          <a:p>
-            <a:pPr algn="l">
-              <a:lnSpc>
-                <a:spcPct val="105000"/>
-              </a:lnSpc>
-              <a:spcAft>
-                <a:spcPts val="200"/>
-              </a:spcAft>
-            </a:pPr>
-            <a:r>
-              <a:rPr sz="900" b="0">
-                <a:solidFill>
-                  <a:srgbClr val="3D3C3A"/>
-                </a:solidFill>
-                <a:latin typeface="微软雅黑"/>
-                <a:ea typeface="微软雅黑"/>
-              </a:rPr>
-              <a:t>一个申请名下的全部银行流水。每笔交易只有 4 个信息——时间、金额、收支方向、一段文字描述（如 PAYROLL ACME PTY LTD、BILL PAY Fair Go Finance），没有任何现成的「这是工资 / 这是贷款」标签。</a:t>
-            </a:r>
-          </a:p>
-        </p:txBody>
-      </p:sp>
-      <p:sp>
-        <p:nvSpPr>
-          <p:cNvPr id="10" name="Rectangle 9"/>
-          <p:cNvSpPr/>
-          <p:nvPr/>
-        </p:nvSpPr>
-        <p:spPr>
-          <a:xfrm>
-            <a:off x="512064" y="3090672"/>
-            <a:ext cx="54864" cy="164592"/>
-          </a:xfrm>
-          <a:prstGeom prst="rect">
-            <a:avLst/>
-          </a:prstGeom>
-          <a:solidFill>
-            <a:srgbClr val="D6A000"/>
-          </a:solidFill>
-          <a:ln>
-            <a:noFill/>
-          </a:ln>
-          <a:effectLst/>
-        </p:spPr>
-        <p:style>
-          <a:lnRef idx="1">
-            <a:schemeClr val="accent1"/>
-          </a:lnRef>
-          <a:fillRef idx="3">
-            <a:schemeClr val="accent1"/>
-          </a:fillRef>
-          <a:effectRef idx="2">
-            <a:schemeClr val="accent1"/>
-          </a:effectRef>
-          <a:fontRef idx="minor">
-            <a:schemeClr val="lt1"/>
-          </a:fontRef>
-        </p:style>
-        <p:txBody>
-          <a:bodyPr rtlCol="0" anchor="ctr"/>
-          <a:lstStyle/>
-          <a:p>
-            <a:pPr algn="ctr"/>
-            <a:endParaRPr/>
-          </a:p>
-        </p:txBody>
-      </p:sp>
-      <p:sp>
-        <p:nvSpPr>
-          <p:cNvPr id="11" name="TextBox 10"/>
-          <p:cNvSpPr txBox="1"/>
-          <p:nvPr/>
-        </p:nvSpPr>
-        <p:spPr>
-          <a:xfrm>
-            <a:off x="640080" y="3063240"/>
-            <a:ext cx="4297680" cy="800099"/>
-          </a:xfrm>
-          <a:prstGeom prst="rect">
-            <a:avLst/>
-          </a:prstGeom>
-          <a:noFill/>
-        </p:spPr>
-        <p:txBody>
-          <a:bodyPr wrap="square" lIns="0" tIns="0" rIns="0" bIns="0" anchor="t"/>
-          <a:lstStyle/>
-          <a:p>
-            <a:pPr algn="l">
-              <a:lnSpc>
-                <a:spcPct val="100000"/>
-              </a:lnSpc>
-              <a:spcAft>
-                <a:spcPts val="200"/>
-              </a:spcAft>
-            </a:pPr>
-            <a:r>
-              <a:rPr sz="1000" b="1">
-                <a:solidFill>
-                  <a:srgbClr val="0A0A0A"/>
-                </a:solidFill>
-                <a:latin typeface="微软雅黑"/>
-                <a:ea typeface="微软雅黑"/>
-              </a:rPr>
-              <a:t>输出是什么</a:t>
-            </a:r>
-          </a:p>
-          <a:p>
-            <a:pPr algn="l">
-              <a:lnSpc>
-                <a:spcPct val="105000"/>
-              </a:lnSpc>
-              <a:spcAft>
-                <a:spcPts val="200"/>
-              </a:spcAft>
-            </a:pPr>
-            <a:r>
-              <a:rPr sz="900" b="0">
-                <a:solidFill>
-                  <a:srgbClr val="3D3C3A"/>
-                </a:solidFill>
-                <a:latin typeface="微软雅黑"/>
-                <a:ea typeface="微软雅黑"/>
-              </a:rPr>
-              <a:t>① 每笔交易打上分类标签 + 交易对手（共 </a:t>
-            </a:r>
-            <a:r>
-              <a:rPr sz="900" b="1">
-                <a:solidFill>
-                  <a:srgbClr val="1F4E79"/>
-                </a:solidFill>
-                <a:latin typeface="微软雅黑"/>
-                <a:ea typeface="微软雅黑"/>
-              </a:rPr>
-              <a:t>35 个类别</a:t>
-            </a:r>
-            <a:r>
-              <a:rPr sz="900" b="0">
-                <a:solidFill>
-                  <a:srgbClr val="3D3C3A"/>
-                </a:solidFill>
-                <a:latin typeface="微软雅黑"/>
-                <a:ea typeface="微软雅黑"/>
-              </a:rPr>
-              <a:t>，如 Wages / SACC Loans / 消费）；② 收入流（月收入估算、预计下次发薪日）；③ 负债流——把外部金融机构的放款与还款交易，聚合成一条条「贷款档案」；④ 分类汇总成客户财务画像，下游据此计算可支配盈余、完成信审。</a:t>
-            </a:r>
-          </a:p>
-        </p:txBody>
-      </p:sp>
-      <p:sp>
-        <p:nvSpPr>
-          <p:cNvPr id="12" name="Rectangle 11"/>
-          <p:cNvSpPr/>
-          <p:nvPr/>
-        </p:nvSpPr>
-        <p:spPr>
-          <a:xfrm>
-            <a:off x="512064" y="4279392"/>
-            <a:ext cx="54864" cy="164592"/>
-          </a:xfrm>
-          <a:prstGeom prst="rect">
-            <a:avLst/>
-          </a:prstGeom>
-          <a:solidFill>
-            <a:srgbClr val="D6A000"/>
-          </a:solidFill>
-          <a:ln>
-            <a:noFill/>
-          </a:ln>
-          <a:effectLst/>
-        </p:spPr>
-        <p:style>
-          <a:lnRef idx="1">
-            <a:schemeClr val="accent1"/>
-          </a:lnRef>
-          <a:fillRef idx="3">
-            <a:schemeClr val="accent1"/>
-          </a:fillRef>
-          <a:effectRef idx="2">
-            <a:schemeClr val="accent1"/>
-          </a:effectRef>
-          <a:fontRef idx="minor">
-            <a:schemeClr val="lt1"/>
-          </a:fontRef>
-        </p:style>
-        <p:txBody>
-          <a:bodyPr rtlCol="0" anchor="ctr"/>
-          <a:lstStyle/>
-          <a:p>
-            <a:pPr algn="ctr"/>
-            <a:endParaRPr/>
-          </a:p>
-        </p:txBody>
-      </p:sp>
-      <p:sp>
-        <p:nvSpPr>
-          <p:cNvPr id="13" name="TextBox 12"/>
-          <p:cNvSpPr txBox="1"/>
-          <p:nvPr/>
-        </p:nvSpPr>
-        <p:spPr>
-          <a:xfrm>
-            <a:off x="640080" y="4251960"/>
-            <a:ext cx="4297680" cy="537210"/>
-          </a:xfrm>
-          <a:prstGeom prst="rect">
-            <a:avLst/>
-          </a:prstGeom>
-          <a:noFill/>
-        </p:spPr>
-        <p:txBody>
-          <a:bodyPr wrap="square" lIns="0" tIns="0" rIns="0" bIns="0" anchor="t"/>
-          <a:lstStyle/>
-          <a:p>
-            <a:pPr algn="l">
-              <a:lnSpc>
-                <a:spcPct val="100000"/>
-              </a:lnSpc>
-              <a:spcAft>
-                <a:spcPts val="200"/>
-              </a:spcAft>
-            </a:pPr>
-            <a:r>
-              <a:rPr sz="1000" b="1">
-                <a:solidFill>
-                  <a:srgbClr val="0A0A0A"/>
-                </a:solidFill>
-                <a:latin typeface="微软雅黑"/>
-                <a:ea typeface="微软雅黑"/>
-              </a:rPr>
-              <a:t>翻译示例</a:t>
-            </a:r>
-          </a:p>
-          <a:p>
-            <a:pPr algn="l">
-              <a:lnSpc>
-                <a:spcPct val="105000"/>
-              </a:lnSpc>
-              <a:spcAft>
-                <a:spcPts val="200"/>
-              </a:spcAft>
-            </a:pPr>
-            <a:r>
-              <a:rPr sz="900" b="0">
-                <a:solidFill>
-                  <a:srgbClr val="3D3C3A"/>
-                </a:solidFill>
-                <a:latin typeface="微软雅黑"/>
-                <a:ea typeface="微软雅黑"/>
-              </a:rPr>
-              <a:t>PAYROLL ACME PTY LTD → ACME 公司发放的工资，归入收入流；BILL PAY Fair Go Finance → 偿还 Fair Go Finance 的 SACC 贷款，归入负债流。</a:t>
-            </a:r>
-          </a:p>
-        </p:txBody>
-      </p:sp>
-      <p:sp>
-        <p:nvSpPr>
-          <p:cNvPr id="14" name="Rectangle 13"/>
-          <p:cNvSpPr/>
-          <p:nvPr/>
-        </p:nvSpPr>
-        <p:spPr>
-          <a:xfrm>
-            <a:off x="5742432" y="1234440"/>
-            <a:ext cx="54864" cy="164592"/>
-          </a:xfrm>
-          <a:prstGeom prst="rect">
-            <a:avLst/>
-          </a:prstGeom>
-          <a:solidFill>
-            <a:srgbClr val="D6A000"/>
-          </a:solidFill>
-          <a:ln>
-            <a:noFill/>
-          </a:ln>
-          <a:effectLst/>
-        </p:spPr>
-        <p:style>
-          <a:lnRef idx="1">
-            <a:schemeClr val="accent1"/>
-          </a:lnRef>
-          <a:fillRef idx="3">
-            <a:schemeClr val="accent1"/>
-          </a:fillRef>
-          <a:effectRef idx="2">
-            <a:schemeClr val="accent1"/>
-          </a:effectRef>
-          <a:fontRef idx="minor">
-            <a:schemeClr val="lt1"/>
-          </a:fontRef>
-        </p:style>
-        <p:txBody>
-          <a:bodyPr rtlCol="0" anchor="ctr"/>
-          <a:lstStyle/>
-          <a:p>
-            <a:pPr algn="ctr"/>
-            <a:endParaRPr/>
-          </a:p>
-        </p:txBody>
-      </p:sp>
-      <p:sp>
-        <p:nvSpPr>
-          <p:cNvPr id="15" name="TextBox 14"/>
-          <p:cNvSpPr txBox="1"/>
-          <p:nvPr/>
-        </p:nvSpPr>
-        <p:spPr>
-          <a:xfrm>
-            <a:off x="5870448" y="1207008"/>
-            <a:ext cx="5742432" cy="537210"/>
-          </a:xfrm>
-          <a:prstGeom prst="rect">
-            <a:avLst/>
-          </a:prstGeom>
-          <a:noFill/>
-        </p:spPr>
-        <p:txBody>
-          <a:bodyPr wrap="square" lIns="0" tIns="0" rIns="0" bIns="0" anchor="t"/>
-          <a:lstStyle/>
-          <a:p>
-            <a:pPr algn="l">
-              <a:lnSpc>
-                <a:spcPct val="100000"/>
-              </a:lnSpc>
-              <a:spcAft>
-                <a:spcPts val="200"/>
-              </a:spcAft>
-            </a:pPr>
-            <a:r>
-              <a:rPr sz="1000" b="1">
-                <a:solidFill>
-                  <a:srgbClr val="0A0A0A"/>
-                </a:solidFill>
-                <a:latin typeface="微软雅黑"/>
-                <a:ea typeface="微软雅黑"/>
-              </a:rPr>
-              <a:t>输出示例——收入流（演示数据，非真实客户）</a:t>
-            </a:r>
-          </a:p>
-          <a:p>
-            <a:pPr algn="l">
-              <a:lnSpc>
-                <a:spcPct val="105000"/>
-              </a:lnSpc>
-              <a:spcAft>
-                <a:spcPts val="200"/>
-              </a:spcAft>
-            </a:pPr>
-            <a:r>
-              <a:rPr sz="900" b="0">
-                <a:solidFill>
-                  <a:srgbClr val="3D3C3A"/>
-                </a:solidFill>
-                <a:latin typeface="微软雅黑"/>
-                <a:ea typeface="微软雅黑"/>
-              </a:rPr>
-              <a:t>同一雇主的连续发薪被串成一条收入流——ACME 公司每两周发薪 </a:t>
-            </a:r>
-            <a:r>
-              <a:rPr sz="900" b="1">
-                <a:solidFill>
-                  <a:srgbClr val="1F4E79"/>
-                </a:solidFill>
-                <a:latin typeface="微软雅黑"/>
-                <a:ea typeface="微软雅黑"/>
-              </a:rPr>
-              <a:t>A$2,600</a:t>
-            </a:r>
-            <a:r>
-              <a:rPr sz="900" b="0">
-                <a:solidFill>
-                  <a:srgbClr val="3D3C3A"/>
-                </a:solidFill>
-                <a:latin typeface="微软雅黑"/>
-                <a:ea typeface="微软雅黑"/>
-              </a:rPr>
-              <a:t>，月收入估算约 </a:t>
-            </a:r>
-            <a:r>
-              <a:rPr sz="900" b="1">
-                <a:solidFill>
-                  <a:srgbClr val="1F4E79"/>
-                </a:solidFill>
-                <a:latin typeface="微软雅黑"/>
-                <a:ea typeface="微软雅黑"/>
-              </a:rPr>
-              <a:t>A$5,600</a:t>
-            </a:r>
-            <a:r>
-              <a:rPr sz="900" b="0">
-                <a:solidFill>
-                  <a:srgbClr val="3D3C3A"/>
-                </a:solidFill>
-                <a:latin typeface="微软雅黑"/>
-                <a:ea typeface="微软雅黑"/>
-              </a:rPr>
-              <a:t>，预计下次发薪 9 月 11 日。</a:t>
-            </a:r>
-          </a:p>
-        </p:txBody>
-      </p:sp>
-      <p:sp>
-        <p:nvSpPr>
-          <p:cNvPr id="16" name="Rectangle 15"/>
-          <p:cNvSpPr/>
-          <p:nvPr/>
-        </p:nvSpPr>
-        <p:spPr>
-          <a:xfrm>
-            <a:off x="5742432" y="2130551"/>
-            <a:ext cx="54864" cy="164592"/>
-          </a:xfrm>
-          <a:prstGeom prst="rect">
-            <a:avLst/>
-          </a:prstGeom>
-          <a:solidFill>
-            <a:srgbClr val="D6A000"/>
-          </a:solidFill>
-          <a:ln>
-            <a:noFill/>
-          </a:ln>
-          <a:effectLst/>
-        </p:spPr>
-        <p:style>
-          <a:lnRef idx="1">
-            <a:schemeClr val="accent1"/>
-          </a:lnRef>
-          <a:fillRef idx="3">
-            <a:schemeClr val="accent1"/>
-          </a:fillRef>
-          <a:effectRef idx="2">
-            <a:schemeClr val="accent1"/>
-          </a:effectRef>
-          <a:fontRef idx="minor">
-            <a:schemeClr val="lt1"/>
-          </a:fontRef>
-        </p:style>
-        <p:txBody>
-          <a:bodyPr rtlCol="0" anchor="ctr"/>
-          <a:lstStyle/>
-          <a:p>
-            <a:pPr algn="ctr"/>
-            <a:endParaRPr/>
-          </a:p>
-        </p:txBody>
-      </p:sp>
-      <p:sp>
-        <p:nvSpPr>
-          <p:cNvPr id="17" name="TextBox 16"/>
-          <p:cNvSpPr txBox="1"/>
-          <p:nvPr/>
-        </p:nvSpPr>
-        <p:spPr>
-          <a:xfrm>
-            <a:off x="5870448" y="2103120"/>
-            <a:ext cx="5742432" cy="800099"/>
-          </a:xfrm>
-          <a:prstGeom prst="rect">
-            <a:avLst/>
-          </a:prstGeom>
-          <a:noFill/>
-        </p:spPr>
-        <p:txBody>
-          <a:bodyPr wrap="square" lIns="0" tIns="0" rIns="0" bIns="0" anchor="t"/>
-          <a:lstStyle/>
-          <a:p>
-            <a:pPr algn="l">
-              <a:lnSpc>
-                <a:spcPct val="100000"/>
-              </a:lnSpc>
-              <a:spcAft>
-                <a:spcPts val="200"/>
-              </a:spcAft>
-            </a:pPr>
-            <a:r>
-              <a:rPr sz="1000" b="1">
-                <a:solidFill>
-                  <a:srgbClr val="0A0A0A"/>
-                </a:solidFill>
-                <a:latin typeface="微软雅黑"/>
-                <a:ea typeface="微软雅黑"/>
-              </a:rPr>
-              <a:t>输出示例——负债流，核心能力（演示数据，非真实客户）</a:t>
-            </a:r>
-          </a:p>
-          <a:p>
-            <a:pPr algn="l">
-              <a:lnSpc>
-                <a:spcPct val="105000"/>
-              </a:lnSpc>
-              <a:spcAft>
-                <a:spcPts val="200"/>
-              </a:spcAft>
-            </a:pPr>
-            <a:r>
-              <a:rPr sz="900" b="0">
-                <a:solidFill>
-                  <a:srgbClr val="3D3C3A"/>
-                </a:solidFill>
-                <a:latin typeface="微软雅黑"/>
-                <a:ea typeface="微软雅黑"/>
-              </a:rPr>
-              <a:t>银行流水可以还原客户在外部机构的完整多头负债档案。例如 MoneySpot 给该客户发过 3 笔贷款——A$1,200（3月，已结清）、A$1,500（6月，已结清）、A$1,500（7月，在贷）；在贷这笔按 8 期计划、每期约 A$255，推算含费成本率约 </a:t>
-            </a:r>
-            <a:r>
-              <a:rPr sz="900" b="1">
-                <a:solidFill>
-                  <a:srgbClr val="1F4E79"/>
-                </a:solidFill>
-                <a:latin typeface="微软雅黑"/>
-                <a:ea typeface="微软雅黑"/>
-              </a:rPr>
-              <a:t>36%</a:t>
-            </a:r>
-            <a:r>
-              <a:rPr sz="900" b="0">
-                <a:solidFill>
-                  <a:srgbClr val="3D3C3A"/>
-                </a:solidFill>
-                <a:latin typeface="微软雅黑"/>
-                <a:ea typeface="微软雅黑"/>
-              </a:rPr>
-              <a:t>，属 SACC 高成本产品档。汇总到客户级：外部机构 3 家、在贷 3 笔（SACC 2 笔 + BNPL 1 笔）、近 90 天新借款 A$2,300。</a:t>
-            </a:r>
-          </a:p>
-        </p:txBody>
-      </p:sp>
-      <p:sp>
-        <p:nvSpPr>
-          <p:cNvPr id="18" name="Rectangle 17"/>
-          <p:cNvSpPr/>
-          <p:nvPr/>
-        </p:nvSpPr>
-        <p:spPr>
-          <a:xfrm>
-            <a:off x="5742432" y="4096512"/>
-            <a:ext cx="54864" cy="164592"/>
-          </a:xfrm>
-          <a:prstGeom prst="rect">
-            <a:avLst/>
-          </a:prstGeom>
-          <a:solidFill>
-            <a:srgbClr val="D6A000"/>
-          </a:solidFill>
-          <a:ln>
-            <a:noFill/>
-          </a:ln>
-          <a:effectLst/>
-        </p:spPr>
-        <p:style>
-          <a:lnRef idx="1">
-            <a:schemeClr val="accent1"/>
-          </a:lnRef>
-          <a:fillRef idx="3">
-            <a:schemeClr val="accent1"/>
-          </a:fillRef>
-          <a:effectRef idx="2">
-            <a:schemeClr val="accent1"/>
-          </a:effectRef>
-          <a:fontRef idx="minor">
-            <a:schemeClr val="lt1"/>
-          </a:fontRef>
-        </p:style>
-        <p:txBody>
-          <a:bodyPr rtlCol="0" anchor="ctr"/>
-          <a:lstStyle/>
-          <a:p>
-            <a:pPr algn="ctr"/>
-            <a:endParaRPr/>
-          </a:p>
-        </p:txBody>
-      </p:sp>
-      <p:sp>
-        <p:nvSpPr>
-          <p:cNvPr id="19" name="TextBox 18"/>
-          <p:cNvSpPr txBox="1"/>
-          <p:nvPr/>
-        </p:nvSpPr>
-        <p:spPr>
-          <a:xfrm>
-            <a:off x="5870448" y="4069080"/>
-            <a:ext cx="5742432" cy="537210"/>
-          </a:xfrm>
-          <a:prstGeom prst="rect">
-            <a:avLst/>
-          </a:prstGeom>
-          <a:noFill/>
-        </p:spPr>
-        <p:txBody>
-          <a:bodyPr wrap="square" lIns="0" tIns="0" rIns="0" bIns="0" anchor="t"/>
-          <a:lstStyle/>
-          <a:p>
-            <a:pPr algn="l">
-              <a:lnSpc>
-                <a:spcPct val="100000"/>
-              </a:lnSpc>
-              <a:spcAft>
-                <a:spcPts val="200"/>
-              </a:spcAft>
-            </a:pPr>
-            <a:r>
-              <a:rPr sz="1000" b="1">
-                <a:solidFill>
-                  <a:srgbClr val="0A0A0A"/>
-                </a:solidFill>
-                <a:latin typeface="微软雅黑"/>
-                <a:ea typeface="微软雅黑"/>
-              </a:rPr>
-              <a:t>指标体系的丰富性</a:t>
-            </a:r>
-          </a:p>
-          <a:p>
-            <a:pPr algn="l">
-              <a:lnSpc>
-                <a:spcPct val="105000"/>
-              </a:lnSpc>
-              <a:spcAft>
-                <a:spcPts val="200"/>
-              </a:spcAft>
-            </a:pPr>
-            <a:r>
-              <a:rPr sz="900" b="0">
-                <a:solidFill>
-                  <a:srgbClr val="3D3C3A"/>
-                </a:solidFill>
-                <a:latin typeface="微软雅黑"/>
-                <a:ea typeface="微软雅黑"/>
-              </a:rPr>
-              <a:t>定价档位（从放款与还款节奏推算利率）、多头与负债压力（机构数、借款频率、剩余期数）、还款能力（月还款 / 月收入）、资金饥渴度（近 90 天新增借款）等，全部由流水客观还原，不依赖客户自报。</a:t>
-            </a:r>
-          </a:p>
-        </p:txBody>
-      </p:sp>
-      <p:sp>
-        <p:nvSpPr>
-          <p:cNvPr id="20" name="Rectangle 19"/>
-          <p:cNvSpPr/>
-          <p:nvPr/>
-        </p:nvSpPr>
-        <p:spPr>
-          <a:xfrm>
-            <a:off x="5742432" y="4919472"/>
-            <a:ext cx="54864" cy="164592"/>
-          </a:xfrm>
-          <a:prstGeom prst="rect">
-            <a:avLst/>
-          </a:prstGeom>
-          <a:solidFill>
-            <a:srgbClr val="D6A000"/>
-          </a:solidFill>
-          <a:ln>
-            <a:noFill/>
-          </a:ln>
-          <a:effectLst/>
-        </p:spPr>
-        <p:style>
-          <a:lnRef idx="1">
-            <a:schemeClr val="accent1"/>
-          </a:lnRef>
-          <a:fillRef idx="3">
-            <a:schemeClr val="accent1"/>
-          </a:fillRef>
-          <a:effectRef idx="2">
-            <a:schemeClr val="accent1"/>
-          </a:effectRef>
-          <a:fontRef idx="minor">
-            <a:schemeClr val="lt1"/>
-          </a:fontRef>
-        </p:style>
-        <p:txBody>
-          <a:bodyPr rtlCol="0" anchor="ctr"/>
-          <a:lstStyle/>
-          <a:p>
-            <a:pPr algn="ctr"/>
-            <a:endParaRPr/>
-          </a:p>
-        </p:txBody>
-      </p:sp>
-      <p:sp>
-        <p:nvSpPr>
-          <p:cNvPr id="21" name="TextBox 20"/>
-          <p:cNvSpPr txBox="1"/>
-          <p:nvPr/>
-        </p:nvSpPr>
-        <p:spPr>
-          <a:xfrm>
-            <a:off x="5870448" y="4892040"/>
-            <a:ext cx="5742432" cy="405765"/>
-          </a:xfrm>
-          <a:prstGeom prst="rect">
-            <a:avLst/>
-          </a:prstGeom>
-          <a:noFill/>
-        </p:spPr>
-        <p:txBody>
-          <a:bodyPr wrap="square" lIns="0" tIns="0" rIns="0" bIns="0" anchor="t"/>
-          <a:lstStyle/>
-          <a:p>
-            <a:pPr algn="l">
-              <a:lnSpc>
-                <a:spcPct val="100000"/>
-              </a:lnSpc>
-              <a:spcAft>
-                <a:spcPts val="200"/>
-              </a:spcAft>
-            </a:pPr>
-            <a:r>
-              <a:rPr sz="1000" b="1">
-                <a:solidFill>
-                  <a:srgbClr val="0A0A0A"/>
-                </a:solidFill>
-                <a:latin typeface="微软雅黑"/>
-                <a:ea typeface="微软雅黑"/>
-              </a:rPr>
-              <a:t>在链路中的位置</a:t>
-            </a:r>
-          </a:p>
-          <a:p>
-            <a:pPr algn="l">
-              <a:lnSpc>
-                <a:spcPct val="105000"/>
-              </a:lnSpc>
-              <a:spcAft>
-                <a:spcPts val="200"/>
-              </a:spcAft>
-            </a:pPr>
-            <a:r>
-              <a:rPr sz="900" b="0">
-                <a:solidFill>
-                  <a:srgbClr val="3D3C3A"/>
-                </a:solidFill>
-                <a:latin typeface="微软雅黑"/>
-                <a:ea typeface="微软雅黑"/>
-              </a:rPr>
-              <a:t>IDA 发起申请 → IDP 调度 → 流水模型（BS-CAT）→ S-CALC 计算可支配盈余 → 风险模型与信审决策。</a:t>
-            </a:r>
-          </a:p>
-        </p:txBody>
-      </p:sp>
-      <p:sp>
-        <p:nvSpPr>
-          <p:cNvPr id="22" name="Rectangle 21"/>
-          <p:cNvSpPr/>
-          <p:nvPr/>
-        </p:nvSpPr>
-        <p:spPr>
-          <a:xfrm>
-            <a:off x="512064" y="6236208"/>
-            <a:ext cx="10899648" cy="384048"/>
-          </a:xfrm>
-          <a:prstGeom prst="rect">
-            <a:avLst/>
-          </a:prstGeom>
-          <a:solidFill>
-            <a:srgbClr val="FAF3E0"/>
-          </a:solidFill>
-          <a:ln>
-            <a:noFill/>
-          </a:ln>
-          <a:effectLst/>
-        </p:spPr>
-        <p:style>
-          <a:lnRef idx="1">
-            <a:schemeClr val="accent1"/>
-          </a:lnRef>
-          <a:fillRef idx="3">
-            <a:schemeClr val="accent1"/>
-          </a:fillRef>
-          <a:effectRef idx="2">
-            <a:schemeClr val="accent1"/>
-          </a:effectRef>
-          <a:fontRef idx="minor">
-            <a:schemeClr val="lt1"/>
-          </a:fontRef>
-        </p:style>
-        <p:txBody>
-          <a:bodyPr wrap="square" lIns="219456" tIns="18288" rIns="128016" bIns="18288" rtlCol="0" anchor="ctr"/>
-          <a:lstStyle/>
-          <a:p>
-            <a:pPr algn="l">
-              <a:lnSpc>
-                <a:spcPct val="110000"/>
-              </a:lnSpc>
-              <a:spcAft>
-                <a:spcPts val="0"/>
-              </a:spcAft>
-            </a:pPr>
-            <a:r>
-              <a:rPr sz="900" b="1">
-                <a:solidFill>
-                  <a:srgbClr val="0A0A0A"/>
-                </a:solidFill>
-                <a:latin typeface="微软雅黑"/>
-                <a:ea typeface="微软雅黑"/>
-              </a:rPr>
-              <a:t>从流水还原收入与负债，把信审核实从「客户自报」升级为「流水客观还原」。</a:t>
-            </a:r>
-          </a:p>
-        </p:txBody>
-      </p:sp>
-      <p:sp>
-        <p:nvSpPr>
-          <p:cNvPr id="23" name="Rectangle 22"/>
-          <p:cNvSpPr/>
-          <p:nvPr/>
-        </p:nvSpPr>
-        <p:spPr>
-          <a:xfrm>
-            <a:off x="512064" y="6236208"/>
-            <a:ext cx="64008" cy="384048"/>
-          </a:xfrm>
-          <a:prstGeom prst="rect">
-            <a:avLst/>
-          </a:prstGeom>
-          <a:solidFill>
-            <a:srgbClr val="D6A000"/>
-          </a:solidFill>
-          <a:ln>
-            <a:noFill/>
-          </a:ln>
-          <a:effectLst/>
-        </p:spPr>
-        <p:style>
-          <a:lnRef idx="1">
-            <a:schemeClr val="accent1"/>
-          </a:lnRef>
-          <a:fillRef idx="3">
-            <a:schemeClr val="accent1"/>
-          </a:fillRef>
-          <a:effectRef idx="2">
-            <a:schemeClr val="accent1"/>
-          </a:effectRef>
-          <a:fontRef idx="minor">
-            <a:schemeClr val="lt1"/>
-          </a:fontRef>
-        </p:style>
-        <p:txBody>
-          <a:bodyPr rtlCol="0" anchor="ctr"/>
-          <a:lstStyle/>
-          <a:p>
-            <a:pPr algn="ctr"/>
-            <a:endParaRPr/>
+            <a:endParaRPr lang="zh-CN" altLang="en-US"/>
           </a:p>
         </p:txBody>
       </p:sp>
@@ -4874,15 +3929,22 @@
               </a:spcAft>
             </a:pPr>
             <a:r>
-              <a:rPr sz="2000" b="1">
+              <a:rPr sz="2000" b="1" dirty="0" err="1">
                 <a:solidFill>
                   <a:srgbClr val="0A0A0A"/>
                 </a:solidFill>
                 <a:latin typeface="微软雅黑"/>
                 <a:ea typeface="微软雅黑"/>
               </a:rPr>
-              <a:t>模型怎么工作、怎么运维：9 个工位的流水线</a:t>
-            </a:r>
+              <a:t>模型怎么工作、怎么运维</a:t>
+            </a:r>
+            <a:endParaRPr sz="2000" b="1" dirty="0">
+              <a:solidFill>
+                <a:srgbClr val="0A0A0A"/>
+              </a:solidFill>
+              <a:latin typeface="微软雅黑"/>
+              <a:ea typeface="微软雅黑"/>
+            </a:endParaRPr>
           </a:p>
         </p:txBody>
       </p:sp>
@@ -4895,7 +3957,7 @@
         <p:spPr>
           <a:xfrm>
             <a:off x="512064" y="585216"/>
-            <a:ext cx="10899648" cy="438912"/>
+            <a:ext cx="11614772" cy="438912"/>
           </a:xfrm>
           <a:prstGeom prst="rect">
             <a:avLst/>
@@ -4906,23 +3968,60 @@
           <a:bodyPr wrap="square" lIns="0" tIns="0" rIns="0" bIns="0" anchor="t"/>
           <a:lstStyle/>
           <a:p>
-            <a:pPr algn="l">
+            <a:pPr>
               <a:lnSpc>
                 <a:spcPct val="140000"/>
               </a:lnSpc>
-              <a:spcAft>
-                <a:spcPts val="0"/>
-              </a:spcAft>
             </a:pPr>
             <a:r>
-              <a:rPr sz="1800" b="0">
+              <a:rPr lang="zh-CN" altLang="en-US" sz="1800" b="1" dirty="0">
+                <a:solidFill>
+                  <a:srgbClr val="0A0A0A"/>
+                </a:solidFill>
+                <a:latin typeface="微软雅黑"/>
+                <a:ea typeface="微软雅黑"/>
+              </a:rPr>
+              <a:t>架构的每一项取舍都指向同一件事</a:t>
+            </a:r>
+            <a:r>
+              <a:rPr lang="en-US" altLang="zh-CN" sz="1800" b="1" dirty="0">
+                <a:solidFill>
+                  <a:srgbClr val="0A0A0A"/>
+                </a:solidFill>
+                <a:latin typeface="微软雅黑"/>
+                <a:ea typeface="微软雅黑"/>
+              </a:rPr>
+              <a:t>——</a:t>
+            </a:r>
+            <a:r>
+              <a:rPr lang="zh-CN" altLang="en-US" sz="1800" b="1" dirty="0">
+                <a:solidFill>
+                  <a:srgbClr val="0A0A0A"/>
+                </a:solidFill>
+                <a:latin typeface="微软雅黑"/>
+                <a:ea typeface="微软雅黑"/>
+              </a:rPr>
+              <a:t>让规则资产可持续演进，让</a:t>
+            </a:r>
+            <a:r>
+              <a:rPr sz="1800" b="0" dirty="0" err="1">
                 <a:solidFill>
                   <a:srgbClr val="606060"/>
                 </a:solidFill>
                 <a:latin typeface="微软雅黑"/>
                 <a:ea typeface="微软雅黑"/>
               </a:rPr>
-              <a:t>架构的本质，是把专家经验变成可改、可查、可回滚的规则资产——模型越用越准，而非交付后冻结。</a:t>
+              <a:t>模型越用越准，而非交付后冻结</a:t>
+            </a:r>
+            <a:r>
+              <a:rPr sz="1800" b="0" dirty="0">
+                <a:solidFill>
+                  <a:srgbClr val="606060"/>
+                </a:solidFill>
+                <a:latin typeface="微软雅黑"/>
+                <a:ea typeface="微软雅黑"/>
+              </a:rPr>
+              <a:t>。</a:t>
             </a:r>
           </a:p>
         </p:txBody>
@@ -4980,8 +4079,8 @@
         </p:nvSpPr>
         <p:spPr>
           <a:xfrm>
-            <a:off x="512064" y="1170432"/>
-            <a:ext cx="10899648" cy="457200"/>
+            <a:off x="512063" y="1222775"/>
+            <a:ext cx="10899648" cy="164029"/>
           </a:xfrm>
           <a:prstGeom prst="rect">
             <a:avLst/>
@@ -5001,24 +4100,64 @@
               </a:spcAft>
             </a:pPr>
             <a:r>
-              <a:rPr sz="950" b="1">
+              <a:rPr sz="950" b="1" dirty="0" err="1">
                 <a:solidFill>
                   <a:srgbClr val="0A0A0A"/>
                 </a:solidFill>
                 <a:latin typeface="微软雅黑"/>
                 <a:ea typeface="微软雅黑"/>
               </a:rPr>
-              <a:t>架构——9 个工位依次过一遍流水：</a:t>
-            </a:r>
-            <a:r>
-              <a:rPr sz="950" b="0">
+              <a:t>架构</a:t>
+            </a:r>
+            <a:r>
+              <a:rPr sz="950" b="1" dirty="0">
+                <a:solidFill>
+                  <a:srgbClr val="0A0A0A"/>
+                </a:solidFill>
+                <a:latin typeface="微软雅黑"/>
+                <a:ea typeface="微软雅黑"/>
+              </a:rPr>
+              <a:t>——</a:t>
+            </a:r>
+            <a:r>
+              <a:rPr lang="zh-CN" altLang="en-US" sz="950" b="1" dirty="0">
+                <a:solidFill>
+                  <a:srgbClr val="0A0A0A"/>
+                </a:solidFill>
+                <a:latin typeface="微软雅黑"/>
+                <a:ea typeface="微软雅黑"/>
+              </a:rPr>
+              <a:t>多个分类引擎</a:t>
+            </a:r>
+            <a:r>
+              <a:rPr sz="950" b="1" dirty="0" err="1">
+                <a:solidFill>
+                  <a:srgbClr val="0A0A0A"/>
+                </a:solidFill>
+                <a:latin typeface="微软雅黑"/>
+                <a:ea typeface="微软雅黑"/>
+              </a:rPr>
+              <a:t>依次过一遍流水：</a:t>
+            </a:r>
+            <a:r>
+              <a:rPr sz="950" b="0" dirty="0" err="1">
                 <a:solidFill>
                   <a:srgbClr val="3D3C3A"/>
                 </a:solidFill>
                 <a:latin typeface="微软雅黑"/>
                 <a:ea typeface="微软雅黑"/>
               </a:rPr>
-              <a:t>每笔交易按顺序经过各工位，被最合适的工位认领并打上标签；收入、负债两个工位再把认领结果串成「流」。</a:t>
+              <a:t>每笔交易按顺序经过各工位，被最合适的工位认领并打上标签；收入、负债两个工位再把认领结果串成「流</a:t>
+            </a:r>
+            <a:r>
+              <a:rPr sz="950" b="0" dirty="0">
+                <a:solidFill>
+                  <a:srgbClr val="3D3C3A"/>
+                </a:solidFill>
+                <a:latin typeface="微软雅黑"/>
+                <a:ea typeface="微软雅黑"/>
+              </a:rPr>
+              <a:t>」。</a:t>
             </a:r>
           </a:p>
         </p:txBody>
@@ -5031,7 +4170,7 @@
         </p:nvSpPr>
         <p:spPr>
           <a:xfrm>
-            <a:off x="512064" y="1700784"/>
+            <a:off x="512063" y="1666668"/>
             <a:ext cx="10899648" cy="640080"/>
           </a:xfrm>
           <a:prstGeom prst="rect">
@@ -5076,7 +4215,7 @@
         </p:nvSpPr>
         <p:spPr>
           <a:xfrm>
-            <a:off x="576072" y="1810512"/>
+            <a:off x="576071" y="1776396"/>
             <a:ext cx="896112" cy="420624"/>
           </a:xfrm>
           <a:prstGeom prst="rect">
@@ -5137,7 +4276,7 @@
         </p:nvSpPr>
         <p:spPr>
           <a:xfrm>
-            <a:off x="1483156" y="1979676"/>
+            <a:off x="1483155" y="1945560"/>
             <a:ext cx="69494" cy="82296"/>
           </a:xfrm>
           <a:prstGeom prst="rightArrow">
@@ -5182,7 +4321,7 @@
         </p:nvSpPr>
         <p:spPr>
           <a:xfrm>
-            <a:off x="1563624" y="1810512"/>
+            <a:off x="1563623" y="1776396"/>
             <a:ext cx="896112" cy="420624"/>
           </a:xfrm>
           <a:prstGeom prst="rect">
@@ -5245,7 +4384,7 @@
         </p:nvSpPr>
         <p:spPr>
           <a:xfrm>
-            <a:off x="2470708" y="1979676"/>
+            <a:off x="2470707" y="1945560"/>
             <a:ext cx="69494" cy="82296"/>
           </a:xfrm>
           <a:prstGeom prst="rightArrow">
@@ -5290,7 +4429,7 @@
         </p:nvSpPr>
         <p:spPr>
           <a:xfrm>
-            <a:off x="2551176" y="1810512"/>
+            <a:off x="2551175" y="1776396"/>
             <a:ext cx="896112" cy="420624"/>
           </a:xfrm>
           <a:prstGeom prst="rect">
@@ -5353,7 +4492,7 @@
         </p:nvSpPr>
         <p:spPr>
           <a:xfrm>
-            <a:off x="3458260" y="1979676"/>
+            <a:off x="3458259" y="1945560"/>
             <a:ext cx="69494" cy="82296"/>
           </a:xfrm>
           <a:prstGeom prst="rightArrow">
@@ -5398,7 +4537,7 @@
         </p:nvSpPr>
         <p:spPr>
           <a:xfrm>
-            <a:off x="3538728" y="1810512"/>
+            <a:off x="3538727" y="1776396"/>
             <a:ext cx="896112" cy="420624"/>
           </a:xfrm>
           <a:prstGeom prst="rect">
@@ -5461,7 +4600,7 @@
         </p:nvSpPr>
         <p:spPr>
           <a:xfrm>
-            <a:off x="4445812" y="1979676"/>
+            <a:off x="4445811" y="1945560"/>
             <a:ext cx="69494" cy="82296"/>
           </a:xfrm>
           <a:prstGeom prst="rightArrow">
@@ -5506,7 +4645,7 @@
         </p:nvSpPr>
         <p:spPr>
           <a:xfrm>
-            <a:off x="4526280" y="1810512"/>
+            <a:off x="4526279" y="1776396"/>
             <a:ext cx="896112" cy="420624"/>
           </a:xfrm>
           <a:prstGeom prst="rect">
@@ -5569,7 +4708,7 @@
         </p:nvSpPr>
         <p:spPr>
           <a:xfrm>
-            <a:off x="5433364" y="1979676"/>
+            <a:off x="5433363" y="1945560"/>
             <a:ext cx="69494" cy="82296"/>
           </a:xfrm>
           <a:prstGeom prst="rightArrow">
@@ -5614,7 +4753,7 @@
         </p:nvSpPr>
         <p:spPr>
           <a:xfrm>
-            <a:off x="5513832" y="1810512"/>
+            <a:off x="5513831" y="1776396"/>
             <a:ext cx="896112" cy="420624"/>
           </a:xfrm>
           <a:prstGeom prst="rect">
@@ -5677,7 +4816,7 @@
         </p:nvSpPr>
         <p:spPr>
           <a:xfrm>
-            <a:off x="6420916" y="1979676"/>
+            <a:off x="6420915" y="1945560"/>
             <a:ext cx="69494" cy="82296"/>
           </a:xfrm>
           <a:prstGeom prst="rightArrow">
@@ -5722,7 +4861,7 @@
         </p:nvSpPr>
         <p:spPr>
           <a:xfrm>
-            <a:off x="6501384" y="1810512"/>
+            <a:off x="6501383" y="1776396"/>
             <a:ext cx="896112" cy="420624"/>
           </a:xfrm>
           <a:prstGeom prst="rect">
@@ -5785,7 +4924,7 @@
         </p:nvSpPr>
         <p:spPr>
           <a:xfrm>
-            <a:off x="7408468" y="1979676"/>
+            <a:off x="7408467" y="1945560"/>
             <a:ext cx="69494" cy="82296"/>
           </a:xfrm>
           <a:prstGeom prst="rightArrow">
@@ -5830,7 +4969,7 @@
         </p:nvSpPr>
         <p:spPr>
           <a:xfrm>
-            <a:off x="7488936" y="1810512"/>
+            <a:off x="7488935" y="1776396"/>
             <a:ext cx="896112" cy="420624"/>
           </a:xfrm>
           <a:prstGeom prst="rect">
@@ -5893,7 +5032,7 @@
         </p:nvSpPr>
         <p:spPr>
           <a:xfrm>
-            <a:off x="8396020" y="1979676"/>
+            <a:off x="8396019" y="1945560"/>
             <a:ext cx="69494" cy="82296"/>
           </a:xfrm>
           <a:prstGeom prst="rightArrow">
@@ -5938,7 +5077,7 @@
         </p:nvSpPr>
         <p:spPr>
           <a:xfrm>
-            <a:off x="8476488" y="1810512"/>
+            <a:off x="8476487" y="1776396"/>
             <a:ext cx="896112" cy="420624"/>
           </a:xfrm>
           <a:prstGeom prst="rect">
@@ -6001,7 +5140,7 @@
         </p:nvSpPr>
         <p:spPr>
           <a:xfrm>
-            <a:off x="9383572" y="1979676"/>
+            <a:off x="9383571" y="1945560"/>
             <a:ext cx="69494" cy="82296"/>
           </a:xfrm>
           <a:prstGeom prst="rightArrow">
@@ -6046,7 +5185,7 @@
         </p:nvSpPr>
         <p:spPr>
           <a:xfrm>
-            <a:off x="9464040" y="1810512"/>
+            <a:off x="9464039" y="1776396"/>
             <a:ext cx="896112" cy="420624"/>
           </a:xfrm>
           <a:prstGeom prst="rect">
@@ -6109,7 +5248,7 @@
         </p:nvSpPr>
         <p:spPr>
           <a:xfrm>
-            <a:off x="10371124" y="1979676"/>
+            <a:off x="10371123" y="1945560"/>
             <a:ext cx="69494" cy="82296"/>
           </a:xfrm>
           <a:prstGeom prst="rightArrow">
@@ -6154,7 +5293,7 @@
         </p:nvSpPr>
         <p:spPr>
           <a:xfrm>
-            <a:off x="10451592" y="1810512"/>
+            <a:off x="10451591" y="1776396"/>
             <a:ext cx="896112" cy="420624"/>
           </a:xfrm>
           <a:prstGeom prst="rect">
@@ -6346,15 +5485,82 @@
               </a:spcAft>
             </a:pPr>
             <a:r>
-              <a:rPr sz="1000" b="1">
+              <a:rPr sz="1000" b="1" dirty="0" err="1">
                 <a:solidFill>
                   <a:srgbClr val="0A0A0A"/>
                 </a:solidFill>
                 <a:latin typeface="微软雅黑"/>
                 <a:ea typeface="微软雅黑"/>
               </a:rPr>
-              <a:t>设计思考①：为什么用「规则 + 知识库」，而不是训练一个算法模型</a:t>
-            </a:r>
+              <a:t>设计思考</a:t>
+            </a:r>
+            <a:r>
+              <a:rPr sz="1000" b="1" dirty="0">
+                <a:solidFill>
+                  <a:srgbClr val="0A0A0A"/>
+                </a:solidFill>
+                <a:latin typeface="微软雅黑"/>
+                <a:ea typeface="微软雅黑"/>
+              </a:rPr>
+              <a:t>①：</a:t>
+            </a:r>
+            <a:r>
+              <a:rPr sz="1000" b="1" dirty="0" err="1">
+                <a:solidFill>
+                  <a:srgbClr val="0A0A0A"/>
+                </a:solidFill>
+                <a:latin typeface="微软雅黑"/>
+                <a:ea typeface="微软雅黑"/>
+              </a:rPr>
+              <a:t>为什么用「规则</a:t>
+            </a:r>
+            <a:r>
+              <a:rPr sz="1000" b="1" dirty="0">
+                <a:solidFill>
+                  <a:srgbClr val="0A0A0A"/>
+                </a:solidFill>
+                <a:latin typeface="微软雅黑"/>
+                <a:ea typeface="微软雅黑"/>
+              </a:rPr>
+              <a:t> + </a:t>
+            </a:r>
+            <a:r>
+              <a:rPr sz="1000" b="1" dirty="0" err="1">
+                <a:solidFill>
+                  <a:srgbClr val="0A0A0A"/>
+                </a:solidFill>
+                <a:latin typeface="微软雅黑"/>
+                <a:ea typeface="微软雅黑"/>
+              </a:rPr>
+              <a:t>知识库</a:t>
+            </a:r>
+            <a:r>
+              <a:rPr sz="1000" b="1" dirty="0">
+                <a:solidFill>
+                  <a:srgbClr val="0A0A0A"/>
+                </a:solidFill>
+                <a:latin typeface="微软雅黑"/>
+                <a:ea typeface="微软雅黑"/>
+              </a:rPr>
+              <a:t>」，</a:t>
+            </a:r>
+            <a:r>
+              <a:rPr sz="1000" b="1" dirty="0" err="1">
+                <a:solidFill>
+                  <a:srgbClr val="0A0A0A"/>
+                </a:solidFill>
+                <a:latin typeface="微软雅黑"/>
+                <a:ea typeface="微软雅黑"/>
+              </a:rPr>
+              <a:t>而不是训练一个算法模型</a:t>
+            </a:r>
+            <a:endParaRPr sz="1000" b="1" dirty="0">
+              <a:solidFill>
+                <a:srgbClr val="0A0A0A"/>
+              </a:solidFill>
+              <a:latin typeface="微软雅黑"/>
+              <a:ea typeface="微软雅黑"/>
+            </a:endParaRPr>
           </a:p>
           <a:p>
             <a:pPr algn="l">
@@ -6366,34 +5572,74 @@
               </a:spcAft>
             </a:pPr>
             <a:r>
-              <a:rPr sz="850" b="0">
+              <a:rPr sz="850" b="0" dirty="0">
                 <a:solidFill>
                   <a:srgbClr val="3D3C3A"/>
                 </a:solidFill>
                 <a:latin typeface="微软雅黑"/>
                 <a:ea typeface="微软雅黑"/>
               </a:rPr>
-              <a:t>信贷场景的刚需是可解释、可审计：每一笔交易为什么这样分类，都能指到具体规则，被拒客户申诉与监管检查都需要；变更成本极低：改一条规则就是改一行 Excel，不用重新训练、重新部署；能力随业务累积：商户库已滚到 </a:t>
-            </a:r>
-            <a:r>
-              <a:rPr sz="850" b="1">
+              <a:t>信贷场景的刚需是可解释、可审计：每一笔交易为什么这样分类，都能指到具体规则，被拒客户申诉与监管检查都需要；变更成本极低：改一条规则就是改一行 </a:t>
+            </a:r>
+            <a:r>
+              <a:rPr sz="850" b="0" dirty="0" err="1">
+                <a:solidFill>
+                  <a:srgbClr val="3D3C3A"/>
+                </a:solidFill>
+                <a:latin typeface="微软雅黑"/>
+                <a:ea typeface="微软雅黑"/>
+              </a:rPr>
+              <a:t>Excel，不用重新训练、重新部署；能力随业务累积：商户库已滚到</a:t>
+            </a:r>
+            <a:r>
+              <a:rPr sz="850" b="0" dirty="0">
+                <a:solidFill>
+                  <a:srgbClr val="3D3C3A"/>
+                </a:solidFill>
+                <a:latin typeface="微软雅黑"/>
+                <a:ea typeface="微软雅黑"/>
+              </a:rPr>
+              <a:t> </a:t>
+            </a:r>
+            <a:r>
+              <a:rPr sz="850" b="1" dirty="0">
                 <a:solidFill>
                   <a:srgbClr val="1F4E79"/>
                 </a:solidFill>
                 <a:latin typeface="微软雅黑"/>
                 <a:ea typeface="微软雅黑"/>
               </a:rPr>
-              <a:t>87.6 万家</a:t>
-            </a:r>
-            <a:r>
-              <a:rPr sz="850" b="0">
+              <a:t>87.6 </a:t>
+            </a:r>
+            <a:r>
+              <a:rPr sz="850" b="1" dirty="0" err="1">
+                <a:solidFill>
+                  <a:srgbClr val="1F4E79"/>
+                </a:solidFill>
+                <a:latin typeface="微软雅黑"/>
+                <a:ea typeface="微软雅黑"/>
+              </a:rPr>
+              <a:t>万家</a:t>
+            </a:r>
+            <a:r>
+              <a:rPr sz="850" b="0" dirty="0" err="1">
                 <a:solidFill>
                   <a:srgbClr val="3D3C3A"/>
                 </a:solidFill>
                 <a:latin typeface="微软雅黑"/>
                 <a:ea typeface="微软雅黑"/>
               </a:rPr>
-              <a:t>，模型随使用越滚越强。</a:t>
+              <a:t>，模型随使用越滚越强</a:t>
+            </a:r>
+            <a:r>
+              <a:rPr sz="850" b="0" dirty="0">
+                <a:solidFill>
+                  <a:srgbClr val="3D3C3A"/>
+                </a:solidFill>
+                <a:latin typeface="微软雅黑"/>
+                <a:ea typeface="微软雅黑"/>
+              </a:rPr>
+              <a:t>。</a:t>
             </a:r>
           </a:p>
         </p:txBody>
@@ -6472,15 +5718,62 @@
               </a:spcAft>
             </a:pPr>
             <a:r>
-              <a:rPr sz="1000" b="1">
+              <a:rPr sz="1000" b="1" dirty="0" err="1">
                 <a:solidFill>
                   <a:srgbClr val="0A0A0A"/>
                 </a:solidFill>
                 <a:latin typeface="微软雅黑"/>
                 <a:ea typeface="微软雅黑"/>
               </a:rPr>
-              <a:t>设计思考②：为什么拆成 9 个工位</a:t>
-            </a:r>
+              <a:t>设计思考</a:t>
+            </a:r>
+            <a:r>
+              <a:rPr sz="1000" b="1" dirty="0">
+                <a:solidFill>
+                  <a:srgbClr val="0A0A0A"/>
+                </a:solidFill>
+                <a:latin typeface="微软雅黑"/>
+                <a:ea typeface="微软雅黑"/>
+              </a:rPr>
+              <a:t>②：</a:t>
+            </a:r>
+            <a:r>
+              <a:rPr sz="1000" b="1" dirty="0" err="1">
+                <a:solidFill>
+                  <a:srgbClr val="0A0A0A"/>
+                </a:solidFill>
+                <a:latin typeface="微软雅黑"/>
+                <a:ea typeface="微软雅黑"/>
+              </a:rPr>
+              <a:t>为什么拆成</a:t>
+            </a:r>
+            <a:r>
+              <a:rPr sz="1000" b="1" dirty="0">
+                <a:solidFill>
+                  <a:srgbClr val="0A0A0A"/>
+                </a:solidFill>
+                <a:latin typeface="微软雅黑"/>
+                <a:ea typeface="微软雅黑"/>
+              </a:rPr>
+              <a:t> </a:t>
+            </a:r>
+            <a:r>
+              <a:rPr lang="zh-CN" altLang="en-US" sz="1000" b="1" dirty="0">
+                <a:solidFill>
+                  <a:srgbClr val="0A0A0A"/>
+                </a:solidFill>
+                <a:latin typeface="微软雅黑"/>
+                <a:ea typeface="微软雅黑"/>
+              </a:rPr>
+              <a:t>多个引擎</a:t>
+            </a:r>
+            <a:endParaRPr sz="1000" b="1" dirty="0">
+              <a:solidFill>
+                <a:srgbClr val="0A0A0A"/>
+              </a:solidFill>
+              <a:latin typeface="微软雅黑"/>
+              <a:ea typeface="微软雅黑"/>
+            </a:endParaRPr>
           </a:p>
           <a:p>
             <a:pPr algn="l">
@@ -6492,14 +5785,44 @@
               </a:spcAft>
             </a:pPr>
             <a:r>
-              <a:rPr sz="850" b="0">
+              <a:rPr sz="850" b="0" dirty="0" err="1">
                 <a:solidFill>
                   <a:srgbClr val="3D3C3A"/>
                 </a:solidFill>
                 <a:latin typeface="微软雅黑"/>
                 <a:ea typeface="微软雅黑"/>
               </a:rPr>
-              <a:t>职责单一，问题能定位到具体工位；互不干扰：改负债规则不会误伤收入识别；类别冲突靠「顺序 + 保护规则」解决：收入是信审最重要的信号，规则上保护它不被其他工位覆盖；每个工位独立测试、独立迭代，回归检查精确到工位层。</a:t>
+              <a:t>职责单一，问题能定位到具体工位；互不干扰：改负债规则不会误伤收入识别；类别冲突靠「顺序</a:t>
+            </a:r>
+            <a:r>
+              <a:rPr sz="850" b="0" dirty="0">
+                <a:solidFill>
+                  <a:srgbClr val="3D3C3A"/>
+                </a:solidFill>
+                <a:latin typeface="微软雅黑"/>
+                <a:ea typeface="微软雅黑"/>
+              </a:rPr>
+              <a:t> + </a:t>
+            </a:r>
+            <a:r>
+              <a:rPr sz="850" b="0" dirty="0" err="1">
+                <a:solidFill>
+                  <a:srgbClr val="3D3C3A"/>
+                </a:solidFill>
+                <a:latin typeface="微软雅黑"/>
+                <a:ea typeface="微软雅黑"/>
+              </a:rPr>
+              <a:t>保护规则」解决：收入是信审最重要的信号，规则上保护它不被其他工位覆盖；每个工位独立测试、独立迭代，回归检查精确到工位层</a:t>
+            </a:r>
+            <a:r>
+              <a:rPr sz="850" b="0" dirty="0">
+                <a:solidFill>
+                  <a:srgbClr val="3D3C3A"/>
+                </a:solidFill>
+                <a:latin typeface="微软雅黑"/>
+                <a:ea typeface="微软雅黑"/>
+              </a:rPr>
+              <a:t>。</a:t>
             </a:r>
           </a:p>
         </p:txBody>
@@ -6578,15 +5901,42 @@
               </a:spcAft>
             </a:pPr>
             <a:r>
-              <a:rPr sz="1000" b="1">
+              <a:rPr sz="1000" b="1" dirty="0" err="1">
                 <a:solidFill>
                   <a:srgbClr val="0A0A0A"/>
                 </a:solidFill>
                 <a:latin typeface="微软雅黑"/>
                 <a:ea typeface="微软雅黑"/>
               </a:rPr>
-              <a:t>设计思考③：为什么做四层基线回归</a:t>
-            </a:r>
+              <a:t>设计思考</a:t>
+            </a:r>
+            <a:r>
+              <a:rPr sz="1000" b="1" dirty="0">
+                <a:solidFill>
+                  <a:srgbClr val="0A0A0A"/>
+                </a:solidFill>
+                <a:latin typeface="微软雅黑"/>
+                <a:ea typeface="微软雅黑"/>
+              </a:rPr>
+              <a:t>③：</a:t>
+            </a:r>
+            <a:r>
+              <a:rPr sz="1000" b="1" dirty="0" err="1">
+                <a:solidFill>
+                  <a:srgbClr val="0A0A0A"/>
+                </a:solidFill>
+                <a:latin typeface="微软雅黑"/>
+                <a:ea typeface="微软雅黑"/>
+              </a:rPr>
+              <a:t>为什么做四层基线回归</a:t>
+            </a:r>
+            <a:endParaRPr sz="1000" b="1" dirty="0">
+              <a:solidFill>
+                <a:srgbClr val="0A0A0A"/>
+              </a:solidFill>
+              <a:latin typeface="微软雅黑"/>
+              <a:ea typeface="微软雅黑"/>
+            </a:endParaRPr>
           </a:p>
           <a:p>
             <a:pPr algn="l">
@@ -6598,14 +5948,134 @@
               </a:spcAft>
             </a:pPr>
             <a:r>
-              <a:rPr sz="850" b="0">
+              <a:rPr sz="850" b="0" dirty="0">
                 <a:solidFill>
                   <a:srgbClr val="3D3C3A"/>
                 </a:solidFill>
                 <a:latin typeface="微软雅黑"/>
                 <a:ea typeface="微软雅黑"/>
               </a:rPr>
-              <a:t>「最终结果没变」不等于「没影响」：某工位改了规则但没当上最终赢家，最终结果看不出变化，隐患会在未来爆发；四层回归（最终结果 / 各工位认领 / 配置指纹 / 汇总指标）让任何调整都可追溯、可回滚；这也是敢高频更新知识库的前提——更新便宜且安全。</a:t>
+              <a:t>「</a:t>
+            </a:r>
+            <a:r>
+              <a:rPr sz="850" b="0" dirty="0" err="1">
+                <a:solidFill>
+                  <a:srgbClr val="3D3C3A"/>
+                </a:solidFill>
+                <a:latin typeface="微软雅黑"/>
+                <a:ea typeface="微软雅黑"/>
+              </a:rPr>
+              <a:t>最终结果没变」不等于「没影响</a:t>
+            </a:r>
+            <a:r>
+              <a:rPr sz="850" b="0" dirty="0">
+                <a:solidFill>
+                  <a:srgbClr val="3D3C3A"/>
+                </a:solidFill>
+                <a:latin typeface="微软雅黑"/>
+                <a:ea typeface="微软雅黑"/>
+              </a:rPr>
+              <a:t>」：</a:t>
+            </a:r>
+            <a:r>
+              <a:rPr sz="850" b="0" dirty="0" err="1">
+                <a:solidFill>
+                  <a:srgbClr val="3D3C3A"/>
+                </a:solidFill>
+                <a:latin typeface="微软雅黑"/>
+                <a:ea typeface="微软雅黑"/>
+              </a:rPr>
+              <a:t>某工位改了规则但没当上最终赢家，最终结果看不出变化，隐患会在未来爆发；四层回归（最终结果</a:t>
+            </a:r>
+            <a:r>
+              <a:rPr sz="850" b="0" dirty="0">
+                <a:solidFill>
+                  <a:srgbClr val="3D3C3A"/>
+                </a:solidFill>
+                <a:latin typeface="微软雅黑"/>
+                <a:ea typeface="微软雅黑"/>
+              </a:rPr>
+              <a:t> / </a:t>
+            </a:r>
+            <a:r>
+              <a:rPr sz="850" b="0" dirty="0" err="1">
+                <a:solidFill>
+                  <a:srgbClr val="3D3C3A"/>
+                </a:solidFill>
+                <a:latin typeface="微软雅黑"/>
+                <a:ea typeface="微软雅黑"/>
+              </a:rPr>
+              <a:t>各工位认领</a:t>
+            </a:r>
+            <a:r>
+              <a:rPr sz="850" b="0" dirty="0">
+                <a:solidFill>
+                  <a:srgbClr val="3D3C3A"/>
+                </a:solidFill>
+                <a:latin typeface="微软雅黑"/>
+                <a:ea typeface="微软雅黑"/>
+              </a:rPr>
+              <a:t> / </a:t>
+            </a:r>
+            <a:r>
+              <a:rPr sz="850" b="0" dirty="0" err="1">
+                <a:solidFill>
+                  <a:srgbClr val="3D3C3A"/>
+                </a:solidFill>
+                <a:latin typeface="微软雅黑"/>
+                <a:ea typeface="微软雅黑"/>
+              </a:rPr>
+              <a:t>配置指纹</a:t>
+            </a:r>
+            <a:r>
+              <a:rPr sz="850" b="0" dirty="0">
+                <a:solidFill>
+                  <a:srgbClr val="3D3C3A"/>
+                </a:solidFill>
+                <a:latin typeface="微软雅黑"/>
+                <a:ea typeface="微软雅黑"/>
+              </a:rPr>
+              <a:t> / </a:t>
+            </a:r>
+            <a:r>
+              <a:rPr sz="850" b="0" dirty="0" err="1">
+                <a:solidFill>
+                  <a:srgbClr val="3D3C3A"/>
+                </a:solidFill>
+                <a:latin typeface="微软雅黑"/>
+                <a:ea typeface="微软雅黑"/>
+              </a:rPr>
+              <a:t>汇总指标）让任何调整都可追溯、可回滚；这也是敢高频更新知识库的前提</a:t>
+            </a:r>
+            <a:r>
+              <a:rPr sz="850" b="0" dirty="0">
+                <a:solidFill>
+                  <a:srgbClr val="3D3C3A"/>
+                </a:solidFill>
+                <a:latin typeface="微软雅黑"/>
+                <a:ea typeface="微软雅黑"/>
+              </a:rPr>
+              <a:t>——</a:t>
+            </a:r>
+            <a:r>
+              <a:rPr sz="850" b="0" dirty="0" err="1">
+                <a:solidFill>
+                  <a:srgbClr val="3D3C3A"/>
+                </a:solidFill>
+                <a:latin typeface="微软雅黑"/>
+                <a:ea typeface="微软雅黑"/>
+              </a:rPr>
+              <a:t>更新便宜且安全</a:t>
+            </a:r>
+            <a:r>
+              <a:rPr sz="850" b="0" dirty="0">
+                <a:solidFill>
+                  <a:srgbClr val="3D3C3A"/>
+                </a:solidFill>
+                <a:latin typeface="微软雅黑"/>
+                <a:ea typeface="微软雅黑"/>
+              </a:rPr>
+              <a:t>。</a:t>
             </a:r>
           </a:p>
         </p:txBody>
@@ -6789,8 +6259,8 @@
         </p:nvSpPr>
         <p:spPr>
           <a:xfrm>
-            <a:off x="640080" y="5166360"/>
-            <a:ext cx="5212080" cy="668655"/>
+            <a:off x="640079" y="5166360"/>
+            <a:ext cx="10707623" cy="668655"/>
           </a:xfrm>
           <a:prstGeom prst="rect">
             <a:avLst/>
@@ -6810,14 +6280,44 @@
               </a:spcAft>
             </a:pPr>
             <a:r>
-              <a:rPr sz="1000" b="1">
+              <a:rPr sz="1000" b="1" dirty="0" err="1">
                 <a:solidFill>
                   <a:srgbClr val="0A0A0A"/>
                 </a:solidFill>
                 <a:latin typeface="微软雅黑"/>
                 <a:ea typeface="微软雅黑"/>
               </a:rPr>
-              <a:t>怎么运维：「2 人 + 1 个 AI 助手」</a:t>
+              <a:t>怎么运维</a:t>
+            </a:r>
+            <a:r>
+              <a:rPr sz="1000" b="1" dirty="0">
+                <a:solidFill>
+                  <a:srgbClr val="0A0A0A"/>
+                </a:solidFill>
+                <a:latin typeface="微软雅黑"/>
+                <a:ea typeface="微软雅黑"/>
+              </a:rPr>
+              <a:t>：「2 人 + 1 个 AI </a:t>
+            </a:r>
+            <a:r>
+              <a:rPr sz="1000" b="1" dirty="0" err="1">
+                <a:solidFill>
+                  <a:srgbClr val="0A0A0A"/>
+                </a:solidFill>
+                <a:latin typeface="微软雅黑"/>
+                <a:ea typeface="微软雅黑"/>
+              </a:rPr>
+              <a:t>助手</a:t>
+            </a:r>
+            <a:r>
+              <a:rPr sz="1000" b="1" dirty="0">
+                <a:solidFill>
+                  <a:srgbClr val="0A0A0A"/>
+                </a:solidFill>
+                <a:latin typeface="微软雅黑"/>
+                <a:ea typeface="微软雅黑"/>
+              </a:rPr>
+              <a:t>」</a:t>
             </a:r>
           </a:p>
           <a:p>
@@ -6830,120 +6330,104 @@
               </a:spcAft>
             </a:pPr>
             <a:r>
-              <a:rPr sz="850" b="0">
+              <a:rPr sz="850" b="0" dirty="0" err="1">
                 <a:solidFill>
                   <a:srgbClr val="3D3C3A"/>
                 </a:solidFill>
                 <a:latin typeface="微软雅黑"/>
                 <a:ea typeface="微软雅黑"/>
               </a:rPr>
-              <a:t>模型团队同学负责主动运维（质检监控、分类漂移与模型波动），并处理人审团队以 ticket 反馈的 case，给出解决方案与代码修改；AI 助手负责两类监测：分类异常波动与大量缺失的主动提示、市面上新商户的新增监测。</a:t>
-            </a:r>
-          </a:p>
-        </p:txBody>
-      </p:sp>
-      <p:sp>
-        <p:nvSpPr>
-          <p:cNvPr id="39" name="Rectangle 38"/>
-          <p:cNvSpPr/>
-          <p:nvPr/>
-        </p:nvSpPr>
-        <p:spPr>
-          <a:xfrm>
-            <a:off x="6071616" y="5193792"/>
-            <a:ext cx="54864" cy="164592"/>
-          </a:xfrm>
-          <a:prstGeom prst="rect">
-            <a:avLst/>
-          </a:prstGeom>
-          <a:solidFill>
-            <a:srgbClr val="D6A000"/>
-          </a:solidFill>
-          <a:ln>
-            <a:noFill/>
-          </a:ln>
-          <a:effectLst/>
-        </p:spPr>
-        <p:style>
-          <a:lnRef idx="1">
-            <a:schemeClr val="accent1"/>
-          </a:lnRef>
-          <a:fillRef idx="3">
-            <a:schemeClr val="accent1"/>
-          </a:fillRef>
-          <a:effectRef idx="2">
-            <a:schemeClr val="accent1"/>
-          </a:effectRef>
-          <a:fontRef idx="minor">
-            <a:schemeClr val="lt1"/>
-          </a:fontRef>
-        </p:style>
-        <p:txBody>
-          <a:bodyPr rtlCol="0" anchor="ctr"/>
-          <a:lstStyle/>
-          <a:p>
-            <a:pPr algn="ctr"/>
-            <a:endParaRPr/>
-          </a:p>
-        </p:txBody>
-      </p:sp>
-      <p:sp>
-        <p:nvSpPr>
-          <p:cNvPr id="40" name="TextBox 39"/>
-          <p:cNvSpPr txBox="1"/>
-          <p:nvPr/>
-        </p:nvSpPr>
-        <p:spPr>
-          <a:xfrm>
-            <a:off x="6199631" y="5166360"/>
-            <a:ext cx="5212080" cy="537210"/>
-          </a:xfrm>
-          <a:prstGeom prst="rect">
-            <a:avLst/>
-          </a:prstGeom>
-          <a:noFill/>
-        </p:spPr>
-        <p:txBody>
-          <a:bodyPr wrap="square" lIns="0" tIns="0" rIns="0" bIns="0" anchor="t"/>
-          <a:lstStyle/>
-          <a:p>
-            <a:pPr algn="l">
-              <a:lnSpc>
-                <a:spcPct val="100000"/>
-              </a:lnSpc>
-              <a:spcAft>
-                <a:spcPts val="200"/>
-              </a:spcAft>
-            </a:pPr>
-            <a:r>
-              <a:rPr sz="1000" b="1">
-                <a:solidFill>
-                  <a:srgbClr val="0A0A0A"/>
-                </a:solidFill>
-                <a:latin typeface="微软雅黑"/>
-                <a:ea typeface="微软雅黑"/>
-              </a:rPr>
-              <a:t>相对 illion 的收益</a:t>
-            </a:r>
-          </a:p>
-          <a:p>
-            <a:pPr algn="l">
-              <a:lnSpc>
-                <a:spcPct val="105000"/>
-              </a:lnSpc>
-              <a:spcAft>
-                <a:spcPts val="200"/>
-              </a:spcAft>
-            </a:pPr>
-            <a:r>
-              <a:rPr sz="850" b="0">
+              <a:t>模型团队同学负责主动运维（质检监控、分类漂移与模型波动</a:t>
+            </a:r>
+            <a:r>
+              <a:rPr sz="850" b="0" dirty="0">
                 <a:solidFill>
                   <a:srgbClr val="3D3C3A"/>
                 </a:solidFill>
                 <a:latin typeface="微软雅黑"/>
                 <a:ea typeface="微软雅黑"/>
               </a:rPr>
-              <a:t>逻辑透明、问题可定位；粒度可控（SACC / Non-SACC / BNPL / LOC / EWA 可拆分）；口径可配置；Open Banking 等新数据源可直接接入。</a:t>
+              <a:t>），</a:t>
+            </a:r>
+            <a:r>
+              <a:rPr sz="850" b="0" dirty="0" err="1">
+                <a:solidFill>
+                  <a:srgbClr val="3D3C3A"/>
+                </a:solidFill>
+                <a:latin typeface="微软雅黑"/>
+                <a:ea typeface="微软雅黑"/>
+              </a:rPr>
+              <a:t>并处理人审团队以</a:t>
+            </a:r>
+            <a:r>
+              <a:rPr sz="850" b="0" dirty="0">
+                <a:solidFill>
+                  <a:srgbClr val="3D3C3A"/>
+                </a:solidFill>
+                <a:latin typeface="微软雅黑"/>
+                <a:ea typeface="微软雅黑"/>
+              </a:rPr>
+              <a:t> ticket </a:t>
+            </a:r>
+            <a:r>
+              <a:rPr sz="850" b="0" dirty="0" err="1">
+                <a:solidFill>
+                  <a:srgbClr val="3D3C3A"/>
+                </a:solidFill>
+                <a:latin typeface="微软雅黑"/>
+                <a:ea typeface="微软雅黑"/>
+              </a:rPr>
+              <a:t>反馈的</a:t>
+            </a:r>
+            <a:r>
+              <a:rPr sz="850" b="0" dirty="0">
+                <a:solidFill>
+                  <a:srgbClr val="3D3C3A"/>
+                </a:solidFill>
+                <a:latin typeface="微软雅黑"/>
+                <a:ea typeface="微软雅黑"/>
+              </a:rPr>
+              <a:t> </a:t>
+            </a:r>
+            <a:r>
+              <a:rPr sz="850" b="0" dirty="0" err="1">
+                <a:solidFill>
+                  <a:srgbClr val="3D3C3A"/>
+                </a:solidFill>
+                <a:latin typeface="微软雅黑"/>
+                <a:ea typeface="微软雅黑"/>
+              </a:rPr>
+              <a:t>case，给出解决方案与代码修改；AI</a:t>
+            </a:r>
+            <a:r>
+              <a:rPr sz="850" b="0" dirty="0">
+                <a:solidFill>
+                  <a:srgbClr val="3D3C3A"/>
+                </a:solidFill>
+                <a:latin typeface="微软雅黑"/>
+                <a:ea typeface="微软雅黑"/>
+              </a:rPr>
+              <a:t> </a:t>
+            </a:r>
+            <a:r>
+              <a:rPr sz="850" b="0" dirty="0" err="1">
+                <a:solidFill>
+                  <a:srgbClr val="3D3C3A"/>
+                </a:solidFill>
+                <a:latin typeface="微软雅黑"/>
+                <a:ea typeface="微软雅黑"/>
+              </a:rPr>
+              <a:t>助手负责两类监测：分类异常波动与大量缺失的主动提示、市面上新商户的新增监测</a:t>
+            </a:r>
+            <a:r>
+              <a:rPr sz="850" b="0" dirty="0">
+                <a:solidFill>
+                  <a:srgbClr val="3D3C3A"/>
+                </a:solidFill>
+                <a:latin typeface="微软雅黑"/>
+                <a:ea typeface="微软雅黑"/>
+              </a:rPr>
+              <a:t>。</a:t>
             </a:r>
           </a:p>
         </p:txBody>
@@ -6997,14 +6481,44 @@
               </a:spcAft>
             </a:pPr>
             <a:r>
-              <a:rPr sz="900" b="1">
+              <a:rPr sz="900" b="1" dirty="0" err="1">
                 <a:solidFill>
                   <a:srgbClr val="0A0A0A"/>
                 </a:solidFill>
                 <a:latin typeface="微软雅黑"/>
                 <a:ea typeface="微软雅黑"/>
               </a:rPr>
-              <a:t>架构的每一项取舍都指向同一件事——让规则资产可持续演进：改得动、看得清、回得去。</a:t>
+              <a:t>架构的每一项取舍都指向同一件事</a:t>
+            </a:r>
+            <a:r>
+              <a:rPr sz="900" b="1" dirty="0">
+                <a:solidFill>
+                  <a:srgbClr val="0A0A0A"/>
+                </a:solidFill>
+                <a:latin typeface="微软雅黑"/>
+                <a:ea typeface="微软雅黑"/>
+              </a:rPr>
+              <a:t>——</a:t>
+            </a:r>
+            <a:r>
+              <a:rPr sz="900" b="1" dirty="0" err="1">
+                <a:solidFill>
+                  <a:srgbClr val="0A0A0A"/>
+                </a:solidFill>
+                <a:latin typeface="微软雅黑"/>
+                <a:ea typeface="微软雅黑"/>
+              </a:rPr>
+              <a:t>让规则资产可持续演进：改得动、看得清、回得去</a:t>
+            </a:r>
+            <a:r>
+              <a:rPr sz="900" b="1" dirty="0">
+                <a:solidFill>
+                  <a:srgbClr val="0A0A0A"/>
+                </a:solidFill>
+                <a:latin typeface="微软雅黑"/>
+                <a:ea typeface="微软雅黑"/>
+              </a:rPr>
+              <a:t>。</a:t>
             </a:r>
           </a:p>
         </p:txBody>
